--- a/presentation/PGC_OpenMP_vs_MPI.pptx
+++ b/presentation/PGC_OpenMP_vs_MPI.pptx
@@ -114,22 +114,22 @@
   <p:extLst>
     <p:ext uri="{521415D9-36F7-43E2-AB2F-B90AF26B5E84}">
       <p14:sectionLst xmlns:p14="http://schemas.microsoft.com/office/powerpoint/2010/main">
-        <p14:section name="Intro" id="{2546a56e-17c5-4869-4bee-af4f1e2a69b8}">
+        <p14:section name="Intro" id="{11ffde41-9854-7880-5896-2e8581377eb0}">
           <p14:sldIdLst>
             <p14:sldId id="256"/>
           </p14:sldIdLst>
         </p14:section>
-        <p14:section name="Problem" id="{3de1bb48-ca2d-bb5d-e19e-b93fba42b1c9}">
+        <p14:section name="Problem" id="{ca31bb6c-134e-cfdd-60fb-bd41785d253d}">
           <p14:sldIdLst>
             <p14:sldId id="257"/>
           </p14:sldIdLst>
         </p14:section>
-        <p14:section name="Design" id="{16fb2082-a311-6620-3676-f0f1d7813033}">
+        <p14:section name="Design" id="{0d745960-d43f-e4cd-204b-27de6563d080}">
           <p14:sldIdLst>
             <p14:sldId id="258"/>
           </p14:sldIdLst>
         </p14:section>
-        <p14:section name="Results" id="{d259e59c-b17f-4921-9943-bab270967049}">
+        <p14:section name="Results" id="{fd8a3801-979d-b4fc-fea7-cbc8603c1d85}">
           <p14:sldIdLst>
             <p14:sldId id="259"/>
             <p14:sldId id="260"/>
@@ -137,7 +137,7 @@
             <p14:sldId id="262"/>
           </p14:sldIdLst>
         </p14:section>
-        <p14:section name="Conclusion" id="{a6176737-fc07-b74f-1656-07c77f802da7}">
+        <p14:section name="Conclusion" id="{c72651a8-e77c-e85f-8f46-758888d87534}">
           <p14:sldIdLst>
             <p14:sldId id="263"/>
           </p14:sldIdLst>
@@ -3692,7 +3692,7 @@
                 <a:ea typeface="Calibri" pitchFamily="34" charset="-122"/>
                 <a:cs typeface="Calibri" pitchFamily="34" charset="-120"/>
               </a:rPr>
-              <a:t>OpenMP peaks at 3.96x (heavy, 8 threads) and 3.46x (light, 4 threads)</a:t>
+              <a:t>OpenMP peaks at 3.96x (heavy, 8 threads) and 3.45x (light, 4 threads)</a:t>
             </a:r>
             <a:endParaRPr lang="en-US" sz="1400" dirty="0"/>
           </a:p>
@@ -3891,7 +3891,7 @@
                 <a:ea typeface="Calibri" pitchFamily="34" charset="-122"/>
                 <a:cs typeface="Calibri" pitchFamily="34" charset="-120"/>
               </a:rPr>
-              <a:t>OpenMP heavy: 50% efficient at 8 threads; MPI: only 26%</a:t>
+              <a:t>OpenMP heavy: 49% efficient at 8 threads; MPI: only 26%</a:t>
             </a:r>
             <a:endParaRPr lang="en-US" sz="1400" dirty="0"/>
           </a:p>

--- a/presentation/PGC_OpenMP_vs_MPI.pptx
+++ b/presentation/PGC_OpenMP_vs_MPI.pptx
@@ -4,6 +4,9 @@
   <p:sldMasterIdLst>
     <p:sldMasterId id="2147483648" r:id="rId1"/>
   </p:sldMasterIdLst>
+  <p:notesMasterIdLst>
+    <p:notesMasterId r:id="rId10"/>
+  </p:notesMasterIdLst>
   <p:sldIdLst>
     <p:sldId id="256" r:id="rId2"/>
     <p:sldId id="257" r:id="rId3"/>
@@ -14,10 +17,7 @@
     <p:sldId id="262" r:id="rId8"/>
     <p:sldId id="263" r:id="rId9"/>
   </p:sldIdLst>
-  <p:notesMasterIdLst>
-    <p:notesMasterId r:id="rId10"/>
-  </p:notesMasterIdLst>
-  <p:sldSz cx="9144000" cy="5143500"/>
+  <p:sldSz cx="9144000" cy="5143500" type="screen16x9"/>
   <p:notesSz cx="5143500" cy="9144000"/>
   <p:defaultTextStyle>
     <a:lvl1pPr marL="0" algn="l" defTabSz="914400" rtl="0" eaLnBrk="1" latinLnBrk="0" hangingPunct="1">
@@ -114,22 +114,22 @@
   <p:extLst>
     <p:ext uri="{521415D9-36F7-43E2-AB2F-B90AF26B5E84}">
       <p14:sectionLst xmlns:p14="http://schemas.microsoft.com/office/powerpoint/2010/main">
-        <p14:section name="Intro" id="{11ffde41-9854-7880-5896-2e8581377eb0}">
+        <p14:section name="Intro" id="{11FFDE41-9854-7880-5896-2E8581377EB0}">
           <p14:sldIdLst>
             <p14:sldId id="256"/>
           </p14:sldIdLst>
         </p14:section>
-        <p14:section name="Problem" id="{ca31bb6c-134e-cfdd-60fb-bd41785d253d}">
+        <p14:section name="Problem" id="{CA31BB6C-134E-CFDD-60FB-BD41785D253D}">
           <p14:sldIdLst>
             <p14:sldId id="257"/>
           </p14:sldIdLst>
         </p14:section>
-        <p14:section name="Design" id="{0d745960-d43f-e4cd-204b-27de6563d080}">
+        <p14:section name="Design" id="{0D745960-D43F-E4CD-204B-27DE6563D080}">
           <p14:sldIdLst>
             <p14:sldId id="258"/>
           </p14:sldIdLst>
         </p14:section>
-        <p14:section name="Results" id="{fd8a3801-979d-b4fc-fea7-cbc8603c1d85}">
+        <p14:section name="Results" id="{FD8A3801-979D-B4FC-FEA7-CBC8603C1D85}">
           <p14:sldIdLst>
             <p14:sldId id="259"/>
             <p14:sldId id="260"/>
@@ -137,7 +137,7 @@
             <p14:sldId id="262"/>
           </p14:sldIdLst>
         </p14:section>
-        <p14:section name="Conclusion" id="{c72651a8-e77c-e85f-8f46-758888d87534}">
+        <p14:section name="Conclusion" id="{C72651A8-E77C-E85F-8F46-758888D87534}">
           <p14:sldIdLst>
             <p14:sldId id="263"/>
           </p14:sldIdLst>
@@ -149,6 +149,58 @@
     </p:ext>
   </p:extLst>
 </p:presentation>
+</file>
+
+<file path=ppt/changesInfos/changesInfo1.xml><?xml version="1.0" encoding="utf-8"?>
+<pc:chgInfo xmlns:a="http://schemas.openxmlformats.org/drawingml/2006/main" xmlns:r="http://schemas.openxmlformats.org/officeDocument/2006/relationships" xmlns:ac="http://schemas.microsoft.com/office/drawing/2013/main/command" xmlns:pc="http://schemas.microsoft.com/office/powerpoint/2013/main/command">
+  <pc:docChgLst>
+    <pc:chgData name="Kartik Hegde" userId="42350cb99746de20" providerId="LiveId" clId="{3EB56A58-51B4-4957-A7EF-E6EAE52253AA}"/>
+    <pc:docChg chg="undo custSel modSld">
+      <pc:chgData name="Kartik Hegde" userId="42350cb99746de20" providerId="LiveId" clId="{3EB56A58-51B4-4957-A7EF-E6EAE52253AA}" dt="2026-10-09T13:35:04.785" v="7" actId="20577"/>
+      <pc:docMkLst>
+        <pc:docMk/>
+      </pc:docMkLst>
+      <pc:sldChg chg="delSp mod">
+        <pc:chgData name="Kartik Hegde" userId="42350cb99746de20" providerId="LiveId" clId="{3EB56A58-51B4-4957-A7EF-E6EAE52253AA}" dt="2026-10-09T13:34:36.203" v="0" actId="21"/>
+        <pc:sldMkLst>
+          <pc:docMk/>
+          <pc:sldMk cId="0" sldId="256"/>
+        </pc:sldMkLst>
+        <pc:spChg chg="del">
+          <ac:chgData name="Kartik Hegde" userId="42350cb99746de20" providerId="LiveId" clId="{3EB56A58-51B4-4957-A7EF-E6EAE52253AA}" dt="2026-10-09T13:34:36.203" v="0" actId="21"/>
+          <ac:spMkLst>
+            <pc:docMk/>
+            <pc:sldMk cId="0" sldId="256"/>
+            <ac:spMk id="11" creationId="{00000000-0000-0000-0000-000000000000}"/>
+          </ac:spMkLst>
+        </pc:spChg>
+      </pc:sldChg>
+      <pc:sldChg chg="modSp mod">
+        <pc:chgData name="Kartik Hegde" userId="42350cb99746de20" providerId="LiveId" clId="{3EB56A58-51B4-4957-A7EF-E6EAE52253AA}" dt="2026-10-09T13:35:04.785" v="7" actId="20577"/>
+        <pc:sldMkLst>
+          <pc:docMk/>
+          <pc:sldMk cId="0" sldId="263"/>
+        </pc:sldMkLst>
+        <pc:spChg chg="mod">
+          <ac:chgData name="Kartik Hegde" userId="42350cb99746de20" providerId="LiveId" clId="{3EB56A58-51B4-4957-A7EF-E6EAE52253AA}" dt="2026-10-09T13:35:04.785" v="7" actId="20577"/>
+          <ac:spMkLst>
+            <pc:docMk/>
+            <pc:sldMk cId="0" sldId="263"/>
+            <ac:spMk id="15" creationId="{00000000-0000-0000-0000-000000000000}"/>
+          </ac:spMkLst>
+        </pc:spChg>
+        <pc:spChg chg="mod">
+          <ac:chgData name="Kartik Hegde" userId="42350cb99746de20" providerId="LiveId" clId="{3EB56A58-51B4-4957-A7EF-E6EAE52253AA}" dt="2026-10-09T13:34:45.813" v="2" actId="20577"/>
+          <ac:spMkLst>
+            <pc:docMk/>
+            <pc:sldMk cId="0" sldId="263"/>
+            <ac:spMk id="16" creationId="{00000000-0000-0000-0000-000000000000}"/>
+          </ac:spMkLst>
+        </pc:spChg>
+      </pc:sldChg>
+    </pc:docChg>
+  </pc:docChgLst>
+</pc:chgInfo>
 </file>
 
 <file path=ppt/notesMasters/notesMaster1.xml><?xml version="1.0" encoding="utf-8"?>
@@ -173,234 +225,10 @@
           <a:chExt cx="0" cy="0"/>
         </a:xfrm>
       </p:grpSpPr>
-      <p:sp>
-        <p:nvSpPr>
-          <p:cNvPr id="2" name="Header Placeholder 1"/>
-          <p:cNvSpPr>
-            <a:spLocks noGrp="1"/>
-          </p:cNvSpPr>
-          <p:nvPr>
-            <p:ph type="hdr" sz="quarter"/>
-          </p:nvPr>
-        </p:nvSpPr>
-        <p:spPr>
-          <a:xfrm>
-            <a:off x="0" y="0"/>
-            <a:ext cx="2971800" cy="458788"/>
-          </a:xfrm>
-          <a:prstGeom prst="rect">
-            <a:avLst/>
-          </a:prstGeom>
-        </p:spPr>
-        <p:txBody>
-          <a:bodyPr vert="horz" lIns="91440" tIns="45720" rIns="91440" bIns="45720" rtlCol="0"/>
-          <a:lstStyle>
-            <a:lvl1pPr algn="l">
-              <a:defRPr sz="1200"/>
-            </a:lvl1pPr>
-          </a:lstStyle>
-          <a:p>
-            <a:endParaRPr lang="en-US"/>
-          </a:p>
-        </p:txBody>
-      </p:sp>
-      <p:sp>
-        <p:nvSpPr>
-          <p:cNvPr id="3" name="Date Placeholder 2"/>
-          <p:cNvSpPr>
-            <a:spLocks noGrp="1"/>
-          </p:cNvSpPr>
-          <p:nvPr>
-            <p:ph type="dt" idx="1"/>
-          </p:nvPr>
-        </p:nvSpPr>
-        <p:spPr>
-          <a:xfrm>
-            <a:off x="3884613" y="0"/>
-            <a:ext cx="2971800" cy="458788"/>
-          </a:xfrm>
-          <a:prstGeom prst="rect">
-            <a:avLst/>
-          </a:prstGeom>
-        </p:spPr>
-        <p:txBody>
-          <a:bodyPr vert="horz" lIns="91440" tIns="45720" rIns="91440" bIns="45720" rtlCol="0"/>
-          <a:lstStyle>
-            <a:lvl1pPr algn="r">
-              <a:defRPr sz="1200"/>
-            </a:lvl1pPr>
-          </a:lstStyle>
-          <a:p>
-            <a:fld id="{5282F153-3F37-0F45-9E97-73ACFA13230C}" type="datetimeFigureOut">
-              <a:rPr lang="en-US"/>
-              <a:t>7/23/19</a:t>
-            </a:fld>
-            <a:endParaRPr lang="en-US"/>
-          </a:p>
-        </p:txBody>
-      </p:sp>
-      <p:sp>
-        <p:nvSpPr>
-          <p:cNvPr id="4" name="Slide Image Placeholder 3"/>
-          <p:cNvSpPr>
-            <a:spLocks noGrp="1" noRot="1" noChangeAspect="1"/>
-          </p:cNvSpPr>
-          <p:nvPr>
-            <p:ph type="sldImg" idx="2"/>
-          </p:nvPr>
-        </p:nvSpPr>
-        <p:spPr>
-          <a:xfrm>
-            <a:off x="685800" y="1143000"/>
-            <a:ext cx="5486400" cy="3086100"/>
-          </a:xfrm>
-          <a:prstGeom prst="rect">
-            <a:avLst/>
-          </a:prstGeom>
-          <a:noFill/>
-          <a:ln w="12700">
-            <a:solidFill>
-              <a:prstClr val="black"/>
-            </a:solidFill>
-          </a:ln>
-        </p:spPr>
-        <p:txBody>
-          <a:bodyPr vert="horz" lIns="91440" tIns="45720" rIns="91440" bIns="45720" rtlCol="0" anchor="ctr"/>
-          <a:lstStyle/>
-          <a:p>
-            <a:endParaRPr lang="en-US"/>
-          </a:p>
-        </p:txBody>
-      </p:sp>
-      <p:sp>
-        <p:nvSpPr>
-          <p:cNvPr id="5" name="Notes Placeholder 4"/>
-          <p:cNvSpPr>
-            <a:spLocks noGrp="1"/>
-          </p:cNvSpPr>
-          <p:nvPr>
-            <p:ph type="body" sz="quarter" idx="3"/>
-          </p:nvPr>
-        </p:nvSpPr>
-        <p:spPr>
-          <a:xfrm>
-            <a:off x="685800" y="4400550"/>
-            <a:ext cx="5486400" cy="3600450"/>
-          </a:xfrm>
-          <a:prstGeom prst="rect">
-            <a:avLst/>
-          </a:prstGeom>
-        </p:spPr>
-        <p:txBody>
-          <a:bodyPr vert="horz" lIns="91440" tIns="45720" rIns="91440" bIns="45720" rtlCol="0"/>
-          <a:lstStyle/>
-          <a:p>
-            <a:pPr lvl="0"/>
-            <a:r>
-              <a:rPr lang="en-US"/>
-              <a:t>Click to edit Master text styles</a:t>
-            </a:r>
-          </a:p>
-          <a:p>
-            <a:pPr lvl="1"/>
-            <a:r>
-              <a:rPr lang="en-US"/>
-              <a:t>Second level</a:t>
-            </a:r>
-          </a:p>
-          <a:p>
-            <a:pPr lvl="2"/>
-            <a:r>
-              <a:rPr lang="en-US"/>
-              <a:t>Third level</a:t>
-            </a:r>
-          </a:p>
-          <a:p>
-            <a:pPr lvl="3"/>
-            <a:r>
-              <a:rPr lang="en-US"/>
-              <a:t>Fourth level</a:t>
-            </a:r>
-          </a:p>
-          <a:p>
-            <a:pPr lvl="4"/>
-            <a:r>
-              <a:rPr lang="en-US"/>
-              <a:t>Fifth level</a:t>
-            </a:r>
-          </a:p>
-        </p:txBody>
-      </p:sp>
-      <p:sp>
-        <p:nvSpPr>
-          <p:cNvPr id="6" name="Footer Placeholder 5"/>
-          <p:cNvSpPr>
-            <a:spLocks noGrp="1"/>
-          </p:cNvSpPr>
-          <p:nvPr>
-            <p:ph type="ftr" sz="quarter" idx="4"/>
-          </p:nvPr>
-        </p:nvSpPr>
-        <p:spPr>
-          <a:xfrm>
-            <a:off x="0" y="8685213"/>
-            <a:ext cx="2971800" cy="458787"/>
-          </a:xfrm>
-          <a:prstGeom prst="rect">
-            <a:avLst/>
-          </a:prstGeom>
-        </p:spPr>
-        <p:txBody>
-          <a:bodyPr vert="horz" lIns="91440" tIns="45720" rIns="91440" bIns="45720" rtlCol="0" anchor="b"/>
-          <a:lstStyle>
-            <a:lvl1pPr algn="l">
-              <a:defRPr sz="1200"/>
-            </a:lvl1pPr>
-          </a:lstStyle>
-          <a:p>
-            <a:endParaRPr lang="en-US"/>
-          </a:p>
-        </p:txBody>
-      </p:sp>
-      <p:sp>
-        <p:nvSpPr>
-          <p:cNvPr id="7" name="Slide Number Placeholder 6"/>
-          <p:cNvSpPr>
-            <a:spLocks noGrp="1"/>
-          </p:cNvSpPr>
-          <p:nvPr>
-            <p:ph type="sldNum" sz="quarter" idx="5"/>
-          </p:nvPr>
-        </p:nvSpPr>
-        <p:spPr>
-          <a:xfrm>
-            <a:off x="3884613" y="8685213"/>
-            <a:ext cx="2971800" cy="458787"/>
-          </a:xfrm>
-          <a:prstGeom prst="rect">
-            <a:avLst/>
-          </a:prstGeom>
-        </p:spPr>
-        <p:txBody>
-          <a:bodyPr vert="horz" lIns="91440" tIns="45720" rIns="91440" bIns="45720" rtlCol="0" anchor="b"/>
-          <a:lstStyle>
-            <a:lvl1pPr algn="r">
-              <a:defRPr sz="1200"/>
-            </a:lvl1pPr>
-          </a:lstStyle>
-          <a:p>
-            <a:fld id="{CE5E9CC1-C706-0F49-92D6-E571CC5EEA8F}" type="slidenum">
-              <a:rPr lang="en-US"/>
-              <a:t>‹#›</a:t>
-            </a:fld>
-            <a:endParaRPr lang="en-US"/>
-          </a:p>
-        </p:txBody>
-      </p:sp>
     </p:spTree>
     <p:extLst>
       <p:ext uri="{BB962C8B-B14F-4D97-AF65-F5344CB8AC3E}">
-        <p14:creationId xmlns:p14="http://schemas.microsoft.com/office/powerpoint/2010/main" val="1024086991"/>
+        <p14:creationId xmlns:p14="http://schemas.microsoft.com/office/powerpoint/2010/main" val="45304870"/>
       </p:ext>
     </p:extLst>
   </p:cSld>
@@ -548,7 +376,6 @@
               <a:rPr lang="en-US" dirty="0"/>
               <a:t>Theme: OpenMP vs MPI for data processing. Same operation, three implementations. Colour code used on every graph: blue = OpenMP, orange = MPI.</a:t>
             </a:r>
-            <a:endParaRPr lang="en-US" dirty="0"/>
           </a:p>
         </p:txBody>
       </p:sp>
@@ -636,7 +463,6 @@
               <a:rPr lang="en-US" dirty="0"/>
               <a:t>Dataset: four months of NYC yellow-taxi CSVs (Jan 2015, Jan-Mar 2016). Only trip_distance was extracted into one binary file of 47,248,723 doubles. Results are identical across sequential, OpenMP and MPI, which validates the parallel versions.</a:t>
             </a:r>
-            <a:endParaRPr lang="en-US" dirty="0"/>
           </a:p>
         </p:txBody>
       </p:sp>
@@ -724,7 +550,6 @@
               <a:rPr lang="en-US" dirty="0"/>
               <a:t>Key design difference: OpenMP threads already share the array; MPI must scatter 378 MB from rank 0 to the other processes. That scatter is a serial cost that does not shrink as processes are added.</a:t>
             </a:r>
-            <a:endParaRPr lang="en-US" dirty="0"/>
           </a:p>
         </p:txBody>
       </p:sp>
@@ -812,7 +637,6 @@
               <a:rPr lang="en-US" dirty="0"/>
               <a:t>Full dataset, mean of 5 runs. Speedup = sequential time / parallel time. MPI never exceeds 0.49x in the light mode.</a:t>
             </a:r>
-            <a:endParaRPr lang="en-US" dirty="0"/>
           </a:p>
         </p:txBody>
       </p:sp>
@@ -900,7 +724,6 @@
               <a:rPr lang="en-US" dirty="0"/>
               <a:t>Efficiency = speedup / workers. At 12 workers, hyperthreads and efficiency cores add little.</a:t>
             </a:r>
-            <a:endParaRPr lang="en-US" dirty="0"/>
           </a:p>
         </p:txBody>
       </p:sp>
@@ -988,7 +811,6 @@
               <a:rPr lang="en-US" dirty="0"/>
               <a:t>Rank 0 must send all 378 MB regardless of process count, which acts as a serial fraction (Amdahl). At 12 processes communication rises to 0.79 s in heavy mode because processes outnumber physical cores.</a:t>
             </a:r>
-            <a:endParaRPr lang="en-US" dirty="0"/>
           </a:p>
         </p:txBody>
       </p:sp>
@@ -1076,7 +898,6 @@
               <a:rPr lang="en-US" dirty="0"/>
               <a:t>Small data: thread start-up and messaging overhead dominate. Larger data: compute grows with N, but MPI scatter cost grows with N too.</a:t>
             </a:r>
-            <a:endParaRPr lang="en-US" dirty="0"/>
           </a:p>
         </p:txBody>
       </p:sp>
@@ -1164,7 +985,6 @@
               <a:rPr lang="en-US" dirty="0"/>
               <a:t>Main conclusion: parallelism pays off only when computation per byte moved is large enough. Cluster run to be added.</a:t>
             </a:r>
-            <a:endParaRPr lang="en-US" dirty="0"/>
           </a:p>
         </p:txBody>
       </p:sp>
@@ -1242,6 +1062,7 @@
         <a:solidFill>
           <a:schemeClr val="bg1"/>
         </a:solidFill>
+        <a:effectLst/>
       </p:bgPr>
     </p:bg>
     <p:spTree>
@@ -1261,9 +1082,11 @@
       <p:sp>
         <p:nvSpPr>
           <p:cNvPr id="2" name="Text 0"/>
-          <p:cNvSpPr/>
+          <p:cNvSpPr>
+            <a:spLocks noGrp="1"/>
+          </p:cNvSpPr>
           <p:nvPr>
-            <p:ph idx="100" type="title" hasCustomPrompt="1"/>
+            <p:ph type="title" idx="100" hasCustomPrompt="1"/>
           </p:nvPr>
         </p:nvSpPr>
         <p:spPr>
@@ -1280,7 +1103,7 @@
         <p:txBody>
           <a:bodyPr wrap="square" rtlCol="0"/>
           <a:lstStyle>
-            <a:lvl1pPr algn="l" indent="0" marL="0">
+            <a:lvl1pPr marL="0" indent="0" algn="l">
               <a:buNone/>
               <a:defRPr lang="en-US" sz="3000" b="1" dirty="0">
                 <a:solidFill>
@@ -1293,7 +1116,7 @@
             </a:lvl1pPr>
           </a:lstStyle>
           <a:p>
-            <a:pPr algn="l" indent="0" marL="0">
+            <a:pPr marL="0" indent="0" algn="l">
               <a:buNone/>
             </a:pPr>
             <a:endParaRPr lang="en-US" sz="3000" dirty="0"/>
@@ -1320,7 +1143,7 @@
           </a:prstGeom>
           <a:extLst>
             <a:ext uri="{C572A759-6A51-4108-AA02-DFA0A04FC94B}">
-              <ma14:wrappingTextBoxFlag xmlns:ma14="http://schemas.microsoft.com/office/mac/drawingml/2011/main" val="0"/>
+              <ma14:wrappingTextBoxFlag xmlns:ma14="http://schemas.microsoft.com/office/mac/drawingml/2011/main" xmlns="" val="0"/>
             </a:ext>
           </a:extLst>
         </p:spPr>
@@ -1338,8 +1161,8 @@
           <a:p>
             <a:pPr algn="l"/>
             <a:fld id="{F7021451-1387-4CA6-816F-3879F97B5CBC}" type="slidenum">
-              <a:rPr b="0" lang="en-US"/>
-              <a:t>1002</a:t>
+              <a:rPr lang="en-US" b="0"/>
+              <a:t>‹#›</a:t>
             </a:fld>
             <a:endParaRPr lang="en-US"/>
           </a:p>
@@ -1361,6 +1184,7 @@
         <a:solidFill>
           <a:schemeClr val="bg1"/>
         </a:solidFill>
+        <a:effectLst/>
       </p:bgPr>
     </p:bg>
     <p:spTree>
@@ -1380,9 +1204,11 @@
       <p:sp>
         <p:nvSpPr>
           <p:cNvPr id="2" name="Text 0"/>
-          <p:cNvSpPr/>
+          <p:cNvSpPr>
+            <a:spLocks noGrp="1"/>
+          </p:cNvSpPr>
           <p:nvPr>
-            <p:ph idx="100" type="title" hasCustomPrompt="1"/>
+            <p:ph type="title" idx="100" hasCustomPrompt="1"/>
           </p:nvPr>
         </p:nvSpPr>
         <p:spPr>
@@ -1399,7 +1225,7 @@
         <p:txBody>
           <a:bodyPr wrap="square" rtlCol="0"/>
           <a:lstStyle>
-            <a:lvl1pPr algn="l" indent="0" marL="0">
+            <a:lvl1pPr marL="0" indent="0" algn="l">
               <a:buNone/>
               <a:defRPr lang="en-US" sz="3400" b="1" dirty="0">
                 <a:solidFill>
@@ -1412,7 +1238,7 @@
             </a:lvl1pPr>
           </a:lstStyle>
           <a:p>
-            <a:pPr algn="l" indent="0" marL="0">
+            <a:pPr marL="0" indent="0" algn="l">
               <a:buNone/>
             </a:pPr>
             <a:endParaRPr lang="en-US" sz="3400" dirty="0"/>
@@ -1439,7 +1265,7 @@
           </a:prstGeom>
           <a:extLst>
             <a:ext uri="{C572A759-6A51-4108-AA02-DFA0A04FC94B}">
-              <ma14:wrappingTextBoxFlag xmlns:ma14="http://schemas.microsoft.com/office/mac/drawingml/2011/main" val="0"/>
+              <ma14:wrappingTextBoxFlag xmlns:ma14="http://schemas.microsoft.com/office/mac/drawingml/2011/main" xmlns="" val="0"/>
             </a:ext>
           </a:extLst>
         </p:spPr>
@@ -1457,8 +1283,8 @@
           <a:p>
             <a:pPr algn="l"/>
             <a:fld id="{F7021451-1387-4CA6-816F-3879F97B5CBC}" type="slidenum">
-              <a:rPr b="0" lang="en-US"/>
-              <a:t>1003</a:t>
+              <a:rPr lang="en-US" b="0"/>
+              <a:t>‹#›</a:t>
             </a:fld>
             <a:endParaRPr lang="en-US"/>
           </a:p>
@@ -1475,6 +1301,11 @@
 <file path=ppt/slideMasters/slideMaster1.xml><?xml version="1.0" encoding="utf-8"?>
 <p:sldMaster xmlns:a="http://schemas.openxmlformats.org/drawingml/2006/main" xmlns:r="http://schemas.openxmlformats.org/officeDocument/2006/relationships" xmlns:p="http://schemas.openxmlformats.org/presentationml/2006/main">
   <p:cSld>
+    <p:bg>
+      <p:bgRef idx="1001">
+        <a:schemeClr val="bg1"/>
+      </p:bgRef>
+    </p:bg>
     <p:spTree>
       <p:nvGrpSpPr>
         <p:cNvPr id="1" name=""/>
@@ -1509,7 +1340,7 @@
           </a:prstGeom>
           <a:extLst>
             <a:ext uri="{C572A759-6A51-4108-AA02-DFA0A04FC94B}">
-              <ma14:wrappingTextBoxFlag xmlns:ma14="http://schemas.microsoft.com/office/mac/drawingml/2011/main" val="0"/>
+              <ma14:wrappingTextBoxFlag xmlns:ma14="http://schemas.microsoft.com/office/mac/drawingml/2011/main" xmlns="" val="0"/>
             </a:ext>
           </a:extLst>
         </p:spPr>
@@ -1527,8 +1358,8 @@
           <a:p>
             <a:pPr algn="l"/>
             <a:fld id="{F7021451-1387-4CA6-816F-3879F97B5CBC}" type="slidenum">
-              <a:rPr b="0" lang="en-US"/>
-              <a:t>null</a:t>
+              <a:rPr lang="en-US" b="0"/>
+              <a:t>‹#›</a:t>
             </a:fld>
             <a:endParaRPr lang="en-US"/>
           </a:p>
@@ -1834,11 +1665,11 @@
           <a:bodyPr wrap="square" lIns="0" tIns="0" rIns="0" bIns="0" rtlCol="0" anchor="ctr"/>
           <a:lstStyle/>
           <a:p>
-            <a:pPr indent="0" marL="0">
+            <a:pPr marL="0" indent="0">
               <a:buNone/>
             </a:pPr>
             <a:r>
-              <a:rPr lang="en-US" sz="1400" b="1" spc="400" kern="0" dirty="0">
+              <a:rPr lang="en-US" sz="1400" b="1" kern="0" spc="400" dirty="0">
                 <a:solidFill>
                   <a:schemeClr val="accent1"/>
                 </a:solidFill>
@@ -1873,7 +1704,7 @@
           <a:bodyPr wrap="square" lIns="0" tIns="0" rIns="0" bIns="0" rtlCol="0" anchor="t"/>
           <a:lstStyle/>
           <a:p>
-            <a:pPr indent="0" marL="0">
+            <a:pPr marL="0" indent="0">
               <a:buNone/>
             </a:pPr>
             <a:r>
@@ -1912,7 +1743,7 @@
           <a:bodyPr wrap="square" lIns="0" tIns="0" rIns="0" bIns="0" rtlCol="0" anchor="t"/>
           <a:lstStyle/>
           <a:p>
-            <a:pPr indent="0" marL="0">
+            <a:pPr marL="0" indent="0">
               <a:buNone/>
             </a:pPr>
             <a:r>
@@ -1976,7 +1807,7 @@
           <a:bodyPr wrap="square" lIns="0" tIns="0" rIns="0" bIns="0" rtlCol="0" anchor="ctr"/>
           <a:lstStyle/>
           <a:p>
-            <a:pPr indent="0" marL="0">
+            <a:pPr marL="0" indent="0">
               <a:buNone/>
             </a:pPr>
             <a:r>
@@ -2040,7 +1871,7 @@
           <a:bodyPr wrap="square" lIns="0" tIns="0" rIns="0" bIns="0" rtlCol="0" anchor="ctr"/>
           <a:lstStyle/>
           <a:p>
-            <a:pPr indent="0" marL="0">
+            <a:pPr marL="0" indent="0">
               <a:buNone/>
             </a:pPr>
             <a:r>
@@ -2079,7 +1910,7 @@
           <a:bodyPr wrap="square" lIns="0" tIns="0" rIns="0" bIns="0" rtlCol="0" anchor="ctr"/>
           <a:lstStyle/>
           <a:p>
-            <a:pPr algn="r" indent="0" marL="0">
+            <a:pPr marL="0" indent="0" algn="r">
               <a:buNone/>
             </a:pPr>
             <a:r>
@@ -2094,36 +1925,6 @@
               <a:t>Parallel and GPU Computing (26ECAC304)</a:t>
             </a:r>
             <a:endParaRPr lang="en-US" sz="1200" dirty="0"/>
-          </a:p>
-        </p:txBody>
-      </p:sp>
-      <p:sp>
-        <p:nvSpPr>
-          <p:cNvPr id="11" name="Text 0"/>
-          <p:cNvSpPr/>
-          <p:nvPr>
-            <p:ph idx="100" type="title" hasCustomPrompt="1"/>
-          </p:nvPr>
-        </p:nvSpPr>
-        <p:spPr>
-          <a:xfrm>
-            <a:off x="457200" y="365760"/>
-            <a:ext cx="8229600" cy="731520"/>
-          </a:xfrm>
-          <a:prstGeom prst="rect">
-            <a:avLst/>
-          </a:prstGeom>
-          <a:noFill/>
-          <a:ln/>
-        </p:spPr>
-        <p:txBody>
-          <a:bodyPr wrap="square" lIns="0" tIns="0" rIns="0" bIns="0" rtlCol="0" anchor="ctr"/>
-          <a:lstStyle/>
-          <a:p>
-            <a:pPr algn="l" indent="0" marL="0">
-              <a:buNone/>
-            </a:pPr>
-            <a:endParaRPr lang="en-US" sz="3400" dirty="0"/>
           </a:p>
         </p:txBody>
       </p:sp>
@@ -2147,7 +1948,7 @@
           </a:prstGeom>
           <a:extLst>
             <a:ext uri="{C572A759-6A51-4108-AA02-DFA0A04FC94B}">
-              <ma14:wrappingTextBoxFlag xmlns:ma14="http://schemas.microsoft.com/office/mac/drawingml/2011/main" val="0"/>
+              <ma14:wrappingTextBoxFlag xmlns:ma14="http://schemas.microsoft.com/office/mac/drawingml/2011/main" xmlns="" val="0"/>
             </a:ext>
           </a:extLst>
         </p:spPr>
@@ -2165,7 +1966,7 @@
           <a:p>
             <a:pPr algn="l"/>
             <a:fld id="{F7021451-1387-4CA6-816F-3879F97B5CBC}" type="slidenum">
-              <a:rPr b="0" lang="en-US"/>
+              <a:rPr lang="en-US" b="0"/>
               <a:t>1</a:t>
             </a:fld>
             <a:endParaRPr lang="en-US"/>
@@ -2200,9 +2001,11 @@
       <p:sp>
         <p:nvSpPr>
           <p:cNvPr id="2" name="Text 0"/>
-          <p:cNvSpPr/>
+          <p:cNvSpPr>
+            <a:spLocks noGrp="1"/>
+          </p:cNvSpPr>
           <p:nvPr>
-            <p:ph idx="100" type="title" hasCustomPrompt="1"/>
+            <p:ph type="title" idx="100" hasCustomPrompt="1"/>
           </p:nvPr>
         </p:nvSpPr>
         <p:spPr>
@@ -2220,7 +2023,7 @@
           <a:bodyPr wrap="square" lIns="0" tIns="0" rIns="0" bIns="0" rtlCol="0" anchor="ctr"/>
           <a:lstStyle/>
           <a:p>
-            <a:pPr algn="l" indent="0" marL="0">
+            <a:pPr marL="0" indent="0" algn="l">
               <a:buNone/>
             </a:pPr>
             <a:r>
@@ -2286,7 +2089,7 @@
           <a:bodyPr wrap="square" lIns="0" tIns="0" rIns="0" bIns="0" rtlCol="0" anchor="ctr"/>
           <a:lstStyle/>
           <a:p>
-            <a:pPr indent="0" marL="0">
+            <a:pPr marL="0" indent="0">
               <a:buNone/>
             </a:pPr>
             <a:r>
@@ -2325,7 +2128,7 @@
           <a:bodyPr wrap="square" lIns="0" tIns="0" rIns="0" bIns="0" rtlCol="0" anchor="t"/>
           <a:lstStyle/>
           <a:p>
-            <a:pPr indent="0" marL="0">
+            <a:pPr marL="0" indent="0">
               <a:buNone/>
             </a:pPr>
             <a:r>
@@ -2391,7 +2194,7 @@
           <a:bodyPr wrap="square" lIns="0" tIns="0" rIns="0" bIns="0" rtlCol="0" anchor="ctr"/>
           <a:lstStyle/>
           <a:p>
-            <a:pPr indent="0" marL="0">
+            <a:pPr marL="0" indent="0">
               <a:buNone/>
             </a:pPr>
             <a:r>
@@ -2430,7 +2233,7 @@
           <a:bodyPr wrap="square" lIns="0" tIns="0" rIns="0" bIns="0" rtlCol="0" anchor="t"/>
           <a:lstStyle/>
           <a:p>
-            <a:pPr indent="0" marL="0">
+            <a:pPr marL="0" indent="0">
               <a:buNone/>
             </a:pPr>
             <a:r>
@@ -2496,7 +2299,7 @@
           <a:bodyPr wrap="square" lIns="0" tIns="0" rIns="0" bIns="0" rtlCol="0" anchor="ctr"/>
           <a:lstStyle/>
           <a:p>
-            <a:pPr indent="0" marL="0">
+            <a:pPr marL="0" indent="0">
               <a:buNone/>
             </a:pPr>
             <a:r>
@@ -2535,7 +2338,7 @@
           <a:bodyPr wrap="square" lIns="0" tIns="0" rIns="0" bIns="0" rtlCol="0" anchor="t"/>
           <a:lstStyle/>
           <a:p>
-            <a:pPr indent="0" marL="0">
+            <a:pPr marL="0" indent="0">
               <a:buNone/>
             </a:pPr>
             <a:r>
@@ -2601,7 +2404,7 @@
           <a:bodyPr wrap="square" lIns="0" tIns="0" rIns="0" bIns="0" rtlCol="0" anchor="ctr"/>
           <a:lstStyle/>
           <a:p>
-            <a:pPr indent="0" marL="0">
+            <a:pPr marL="0" indent="0">
               <a:buNone/>
             </a:pPr>
             <a:r>
@@ -2640,7 +2443,7 @@
           <a:bodyPr wrap="square" lIns="0" tIns="0" rIns="0" bIns="0" rtlCol="0" anchor="t"/>
           <a:lstStyle/>
           <a:p>
-            <a:pPr indent="0" marL="0">
+            <a:pPr marL="0" indent="0">
               <a:buNone/>
             </a:pPr>
             <a:r>
@@ -2679,7 +2482,7 @@
           <a:bodyPr wrap="square" lIns="0" tIns="0" rIns="0" bIns="0" rtlCol="0" anchor="ctr"/>
           <a:lstStyle/>
           <a:p>
-            <a:pPr indent="0" marL="0">
+            <a:pPr marL="0" indent="0">
               <a:buNone/>
             </a:pPr>
             <a:r>
@@ -2718,7 +2521,7 @@
           <a:bodyPr wrap="square" lIns="0" tIns="0" rIns="0" bIns="0" rtlCol="0" anchor="t"/>
           <a:lstStyle/>
           <a:p>
-            <a:pPr indent="0" marL="0">
+            <a:pPr marL="0" indent="0">
               <a:spcAft>
                 <a:spcPts val="800"/>
               </a:spcAft>
@@ -2735,14 +2538,28 @@
               </a:rPr>
               <a:t>Mode 0, light: </a:t>
             </a:r>
-            <a:pPr indent="0" marL="0">
+            <a:r>
+              <a:rPr lang="en-US" sz="1400" dirty="0">
+                <a:solidFill>
+                  <a:schemeClr val="tx1"/>
+                </a:solidFill>
+                <a:latin typeface="Calibri" pitchFamily="34" charset="0"/>
+                <a:ea typeface="Calibri" pitchFamily="34" charset="-122"/>
+                <a:cs typeface="Calibri" pitchFamily="34" charset="-120"/>
+              </a:rPr>
+              <a:t>count, min, max, mean, std, trips over 10 miles, histogram</a:t>
+            </a:r>
+            <a:endParaRPr lang="en-US" sz="1400" dirty="0"/>
+          </a:p>
+          <a:p>
+            <a:pPr marL="0" indent="0">
               <a:spcAft>
                 <a:spcPts val="800"/>
               </a:spcAft>
               <a:buNone/>
             </a:pPr>
             <a:r>
-              <a:rPr lang="en-US" sz="1400" dirty="0">
+              <a:rPr lang="en-US" sz="1400" b="1" dirty="0">
                 <a:solidFill>
                   <a:schemeClr val="tx1"/>
                 </a:solidFill>
@@ -2750,19 +2567,10 @@
                 <a:ea typeface="Calibri" pitchFamily="34" charset="-122"/>
                 <a:cs typeface="Calibri" pitchFamily="34" charset="-120"/>
               </a:rPr>
-              <a:t>count, min, max, mean, std, trips over 10 miles, histogram</a:t>
-            </a:r>
-            <a:endParaRPr lang="en-US" sz="1400" dirty="0"/>
-          </a:p>
-          <a:p>
-            <a:pPr indent="0" marL="0">
-              <a:spcAft>
-                <a:spcPts val="800"/>
-              </a:spcAft>
-              <a:buNone/>
-            </a:pPr>
-            <a:r>
-              <a:rPr lang="en-US" sz="1400" b="1" dirty="0">
+              <a:t>Mode 1, heavy: </a:t>
+            </a:r>
+            <a:r>
+              <a:rPr lang="en-US" sz="1400" dirty="0">
                 <a:solidFill>
                   <a:schemeClr val="tx1"/>
                 </a:solidFill>
@@ -2770,39 +2578,61 @@
                 <a:ea typeface="Calibri" pitchFamily="34" charset="-122"/>
                 <a:cs typeface="Calibri" pitchFamily="34" charset="-120"/>
               </a:rPr>
-              <a:t>Mode 1, heavy: </a:t>
-            </a:r>
-            <a:pPr indent="0" marL="0">
-              <a:spcAft>
-                <a:spcPts val="800"/>
-              </a:spcAft>
+              <a:t>Mode 0 plus log-transform mean and std</a:t>
+            </a:r>
+            <a:endParaRPr lang="en-US" sz="1400" dirty="0"/>
+          </a:p>
+        </p:txBody>
+      </p:sp>
+      <p:sp>
+        <p:nvSpPr>
+          <p:cNvPr id="17" name="Text 15"/>
+          <p:cNvSpPr txBox="1"/>
+          <p:nvPr/>
+        </p:nvSpPr>
+        <p:spPr>
+          <a:xfrm>
+            <a:off x="4937760" y="2926080"/>
+            <a:ext cx="3749040" cy="320040"/>
+          </a:xfrm>
+          <a:prstGeom prst="rect">
+            <a:avLst/>
+          </a:prstGeom>
+          <a:noFill/>
+          <a:ln/>
+        </p:spPr>
+        <p:txBody>
+          <a:bodyPr wrap="square" lIns="0" tIns="0" rIns="0" bIns="0" rtlCol="0" anchor="ctr"/>
+          <a:lstStyle/>
+          <a:p>
+            <a:pPr marL="0" indent="0">
               <a:buNone/>
             </a:pPr>
             <a:r>
-              <a:rPr lang="en-US" sz="1400" dirty="0">
-                <a:solidFill>
-                  <a:schemeClr val="tx1"/>
+              <a:rPr lang="en-US" sz="1600" b="1" dirty="0">
+                <a:solidFill>
+                  <a:schemeClr val="tx2"/>
                 </a:solidFill>
                 <a:latin typeface="Calibri" pitchFamily="34" charset="0"/>
                 <a:ea typeface="Calibri" pitchFamily="34" charset="-122"/>
                 <a:cs typeface="Calibri" pitchFamily="34" charset="-120"/>
               </a:rPr>
-              <a:t>Mode 0 plus log-transform mean and std</a:t>
-            </a:r>
-            <a:endParaRPr lang="en-US" sz="1400" dirty="0"/>
-          </a:p>
-        </p:txBody>
-      </p:sp>
-      <p:sp>
-        <p:nvSpPr>
-          <p:cNvPr id="17" name="Text 15"/>
+              <a:t>Why two modes?</a:t>
+            </a:r>
+            <a:endParaRPr lang="en-US" sz="1600" dirty="0"/>
+          </a:p>
+        </p:txBody>
+      </p:sp>
+      <p:sp>
+        <p:nvSpPr>
+          <p:cNvPr id="18" name="Text 16"/>
           <p:cNvSpPr txBox="1"/>
           <p:nvPr/>
         </p:nvSpPr>
         <p:spPr>
           <a:xfrm>
-            <a:off x="4937760" y="2926080"/>
-            <a:ext cx="3749040" cy="320040"/>
+            <a:off x="4937760" y="3291840"/>
+            <a:ext cx="3749040" cy="914400"/>
           </a:xfrm>
           <a:prstGeom prst="rect">
             <a:avLst/>
@@ -2811,37 +2641,37 @@
           <a:ln/>
         </p:spPr>
         <p:txBody>
-          <a:bodyPr wrap="square" lIns="0" tIns="0" rIns="0" bIns="0" rtlCol="0" anchor="ctr"/>
-          <a:lstStyle/>
-          <a:p>
-            <a:pPr indent="0" marL="0">
+          <a:bodyPr wrap="square" lIns="0" tIns="0" rIns="0" bIns="0" rtlCol="0" anchor="t"/>
+          <a:lstStyle/>
+          <a:p>
+            <a:pPr marL="0" indent="0">
               <a:buNone/>
             </a:pPr>
             <a:r>
-              <a:rPr lang="en-US" sz="1600" b="1" dirty="0">
-                <a:solidFill>
-                  <a:schemeClr val="tx2"/>
+              <a:rPr lang="en-US" sz="1400" dirty="0">
+                <a:solidFill>
+                  <a:schemeClr val="tx1"/>
                 </a:solidFill>
                 <a:latin typeface="Calibri" pitchFamily="34" charset="0"/>
                 <a:ea typeface="Calibri" pitchFamily="34" charset="-122"/>
                 <a:cs typeface="Calibri" pitchFamily="34" charset="-120"/>
               </a:rPr>
-              <a:t>Why two modes?</a:t>
-            </a:r>
-            <a:endParaRPr lang="en-US" sz="1600" dirty="0"/>
-          </a:p>
-        </p:txBody>
-      </p:sp>
-      <p:sp>
-        <p:nvSpPr>
-          <p:cNvPr id="18" name="Text 16"/>
+              <a:t>Mode 1 does about 10x more arithmetic per byte than mode 0. That lets us test when parallelism pays off.</a:t>
+            </a:r>
+            <a:endParaRPr lang="en-US" sz="1400" dirty="0"/>
+          </a:p>
+        </p:txBody>
+      </p:sp>
+      <p:sp>
+        <p:nvSpPr>
+          <p:cNvPr id="19" name="Text 17"/>
           <p:cNvSpPr txBox="1"/>
           <p:nvPr/>
         </p:nvSpPr>
         <p:spPr>
           <a:xfrm>
-            <a:off x="4937760" y="3291840"/>
-            <a:ext cx="3749040" cy="914400"/>
+            <a:off x="4937760" y="4160520"/>
+            <a:ext cx="3749040" cy="548640"/>
           </a:xfrm>
           <a:prstGeom prst="rect">
             <a:avLst/>
@@ -2853,46 +2683,7 @@
           <a:bodyPr wrap="square" lIns="0" tIns="0" rIns="0" bIns="0" rtlCol="0" anchor="t"/>
           <a:lstStyle/>
           <a:p>
-            <a:pPr indent="0" marL="0">
-              <a:buNone/>
-            </a:pPr>
-            <a:r>
-              <a:rPr lang="en-US" sz="1400" dirty="0">
-                <a:solidFill>
-                  <a:schemeClr val="tx1"/>
-                </a:solidFill>
-                <a:latin typeface="Calibri" pitchFamily="34" charset="0"/>
-                <a:ea typeface="Calibri" pitchFamily="34" charset="-122"/>
-                <a:cs typeface="Calibri" pitchFamily="34" charset="-120"/>
-              </a:rPr>
-              <a:t>Mode 1 does about 10x more arithmetic per byte than mode 0. That lets us test when parallelism pays off.</a:t>
-            </a:r>
-            <a:endParaRPr lang="en-US" sz="1400" dirty="0"/>
-          </a:p>
-        </p:txBody>
-      </p:sp>
-      <p:sp>
-        <p:nvSpPr>
-          <p:cNvPr id="19" name="Text 17"/>
-          <p:cNvSpPr txBox="1"/>
-          <p:nvPr/>
-        </p:nvSpPr>
-        <p:spPr>
-          <a:xfrm>
-            <a:off x="4937760" y="4160520"/>
-            <a:ext cx="3749040" cy="548640"/>
-          </a:xfrm>
-          <a:prstGeom prst="rect">
-            <a:avLst/>
-          </a:prstGeom>
-          <a:noFill/>
-          <a:ln/>
-        </p:spPr>
-        <p:txBody>
-          <a:bodyPr wrap="square" lIns="0" tIns="0" rIns="0" bIns="0" rtlCol="0" anchor="t"/>
-          <a:lstStyle/>
-          <a:p>
-            <a:pPr indent="0" marL="0">
+            <a:pPr marL="0" indent="0">
               <a:buNone/>
             </a:pPr>
             <a:r>
@@ -2930,7 +2721,7 @@
           </a:prstGeom>
           <a:extLst>
             <a:ext uri="{C572A759-6A51-4108-AA02-DFA0A04FC94B}">
-              <ma14:wrappingTextBoxFlag xmlns:ma14="http://schemas.microsoft.com/office/mac/drawingml/2011/main" val="0"/>
+              <ma14:wrappingTextBoxFlag xmlns:ma14="http://schemas.microsoft.com/office/mac/drawingml/2011/main" xmlns="" val="0"/>
             </a:ext>
           </a:extLst>
         </p:spPr>
@@ -2948,7 +2739,7 @@
           <a:p>
             <a:pPr algn="l"/>
             <a:fld id="{F7021451-1387-4CA6-816F-3879F97B5CBC}" type="slidenum">
-              <a:rPr b="0" lang="en-US"/>
+              <a:rPr lang="en-US" b="0"/>
               <a:t>2</a:t>
             </a:fld>
             <a:endParaRPr lang="en-US"/>
@@ -2983,9 +2774,11 @@
       <p:sp>
         <p:nvSpPr>
           <p:cNvPr id="2" name="Text 0"/>
-          <p:cNvSpPr/>
+          <p:cNvSpPr>
+            <a:spLocks noGrp="1"/>
+          </p:cNvSpPr>
           <p:nvPr>
-            <p:ph idx="100" type="title" hasCustomPrompt="1"/>
+            <p:ph type="title" idx="100" hasCustomPrompt="1"/>
           </p:nvPr>
         </p:nvSpPr>
         <p:spPr>
@@ -3003,7 +2796,7 @@
           <a:bodyPr wrap="square" lIns="0" tIns="0" rIns="0" bIns="0" rtlCol="0" anchor="ctr"/>
           <a:lstStyle/>
           <a:p>
-            <a:pPr algn="l" indent="0" marL="0">
+            <a:pPr marL="0" indent="0" algn="l">
               <a:buNone/>
             </a:pPr>
             <a:r>
@@ -3094,7 +2887,7 @@
           <a:bodyPr wrap="square" lIns="0" tIns="0" rIns="0" bIns="0" rtlCol="0" anchor="ctr"/>
           <a:lstStyle/>
           <a:p>
-            <a:pPr indent="0" marL="0">
+            <a:pPr marL="0" indent="0">
               <a:buNone/>
             </a:pPr>
             <a:r>
@@ -3291,7 +3084,7 @@
           <a:bodyPr wrap="square" lIns="0" tIns="0" rIns="0" bIns="0" rtlCol="0" anchor="ctr"/>
           <a:lstStyle/>
           <a:p>
-            <a:pPr indent="0" marL="0">
+            <a:pPr marL="0" indent="0">
               <a:buNone/>
             </a:pPr>
             <a:r>
@@ -3463,11 +3256,11 @@
           <a:bodyPr wrap="square" lIns="0" tIns="0" rIns="0" bIns="0" rtlCol="0" anchor="ctr"/>
           <a:lstStyle/>
           <a:p>
-            <a:pPr indent="0" marL="0">
+            <a:pPr marL="0" indent="0">
               <a:buNone/>
             </a:pPr>
             <a:r>
-              <a:rPr lang="en-US" sz="1100" b="1" spc="200" kern="0" dirty="0">
+              <a:rPr lang="en-US" sz="1100" b="1" kern="0" spc="200" dirty="0">
                 <a:solidFill>
                   <a:schemeClr val="accent1"/>
                 </a:solidFill>
@@ -3502,7 +3295,7 @@
           <a:bodyPr wrap="square" lIns="0" tIns="0" rIns="0" bIns="0" rtlCol="0" anchor="t"/>
           <a:lstStyle/>
           <a:p>
-            <a:pPr indent="0" marL="0">
+            <a:pPr marL="0" indent="0">
               <a:buNone/>
             </a:pPr>
             <a:r>
@@ -3540,7 +3333,7 @@
           </a:prstGeom>
           <a:extLst>
             <a:ext uri="{C572A759-6A51-4108-AA02-DFA0A04FC94B}">
-              <ma14:wrappingTextBoxFlag xmlns:ma14="http://schemas.microsoft.com/office/mac/drawingml/2011/main" val="0"/>
+              <ma14:wrappingTextBoxFlag xmlns:ma14="http://schemas.microsoft.com/office/mac/drawingml/2011/main" xmlns="" val="0"/>
             </a:ext>
           </a:extLst>
         </p:spPr>
@@ -3558,7 +3351,7 @@
           <a:p>
             <a:pPr algn="l"/>
             <a:fld id="{F7021451-1387-4CA6-816F-3879F97B5CBC}" type="slidenum">
-              <a:rPr b="0" lang="en-US"/>
+              <a:rPr lang="en-US" b="0"/>
               <a:t>3</a:t>
             </a:fld>
             <a:endParaRPr lang="en-US"/>
@@ -3593,9 +3386,11 @@
       <p:sp>
         <p:nvSpPr>
           <p:cNvPr id="2" name="Text 0"/>
-          <p:cNvSpPr/>
+          <p:cNvSpPr>
+            <a:spLocks noGrp="1"/>
+          </p:cNvSpPr>
           <p:nvPr>
-            <p:ph idx="100" type="title" hasCustomPrompt="1"/>
+            <p:ph type="title" idx="100" hasCustomPrompt="1"/>
           </p:nvPr>
         </p:nvSpPr>
         <p:spPr>
@@ -3613,7 +3408,7 @@
           <a:bodyPr wrap="square" lIns="0" tIns="0" rIns="0" bIns="0" rtlCol="0" anchor="ctr"/>
           <a:lstStyle/>
           <a:p>
-            <a:pPr algn="l" indent="0" marL="0">
+            <a:pPr marL="0" indent="0" algn="l">
               <a:buNone/>
             </a:pPr>
             <a:r>
@@ -3633,14 +3428,14 @@
       </p:sp>
       <p:pic>
         <p:nvPicPr>
-          <p:cNvPr id="3" name="Graph" descr="Speedup vs sequential graph">    </p:cNvPr>
+          <p:cNvPr id="3" name="Graph" descr="Speedup vs sequential graph"/>
           <p:cNvPicPr>
             <a:picLocks noChangeAspect="1"/>
           </p:cNvPicPr>
           <p:nvPr/>
         </p:nvPicPr>
         <p:blipFill>
-          <a:blip r:embed="rId1"/>
+          <a:blip r:embed="rId3"/>
           <a:stretch>
             <a:fillRect/>
           </a:stretch>
@@ -3739,7 +3534,7 @@
           </a:prstGeom>
           <a:extLst>
             <a:ext uri="{C572A759-6A51-4108-AA02-DFA0A04FC94B}">
-              <ma14:wrappingTextBoxFlag xmlns:ma14="http://schemas.microsoft.com/office/mac/drawingml/2011/main" val="0"/>
+              <ma14:wrappingTextBoxFlag xmlns:ma14="http://schemas.microsoft.com/office/mac/drawingml/2011/main" xmlns="" val="0"/>
             </a:ext>
           </a:extLst>
         </p:spPr>
@@ -3757,7 +3552,7 @@
           <a:p>
             <a:pPr algn="l"/>
             <a:fld id="{F7021451-1387-4CA6-816F-3879F97B5CBC}" type="slidenum">
-              <a:rPr b="0" lang="en-US"/>
+              <a:rPr lang="en-US" b="0"/>
               <a:t>4</a:t>
             </a:fld>
             <a:endParaRPr lang="en-US"/>
@@ -3792,9 +3587,11 @@
       <p:sp>
         <p:nvSpPr>
           <p:cNvPr id="2" name="Text 0"/>
-          <p:cNvSpPr/>
+          <p:cNvSpPr>
+            <a:spLocks noGrp="1"/>
+          </p:cNvSpPr>
           <p:nvPr>
-            <p:ph idx="100" type="title" hasCustomPrompt="1"/>
+            <p:ph type="title" idx="100" hasCustomPrompt="1"/>
           </p:nvPr>
         </p:nvSpPr>
         <p:spPr>
@@ -3812,7 +3609,7 @@
           <a:bodyPr wrap="square" lIns="0" tIns="0" rIns="0" bIns="0" rtlCol="0" anchor="ctr"/>
           <a:lstStyle/>
           <a:p>
-            <a:pPr algn="l" indent="0" marL="0">
+            <a:pPr marL="0" indent="0" algn="l">
               <a:buNone/>
             </a:pPr>
             <a:r>
@@ -3832,14 +3629,14 @@
       </p:sp>
       <p:pic>
         <p:nvPicPr>
-          <p:cNvPr id="3" name="Graph" descr="Efficiency graph">    </p:cNvPr>
+          <p:cNvPr id="3" name="Graph" descr="Efficiency graph"/>
           <p:cNvPicPr>
             <a:picLocks noChangeAspect="1"/>
           </p:cNvPicPr>
           <p:nvPr/>
         </p:nvPicPr>
         <p:blipFill>
-          <a:blip r:embed="rId1"/>
+          <a:blip r:embed="rId3"/>
           <a:stretch>
             <a:fillRect/>
           </a:stretch>
@@ -3938,7 +3735,7 @@
           </a:prstGeom>
           <a:extLst>
             <a:ext uri="{C572A759-6A51-4108-AA02-DFA0A04FC94B}">
-              <ma14:wrappingTextBoxFlag xmlns:ma14="http://schemas.microsoft.com/office/mac/drawingml/2011/main" val="0"/>
+              <ma14:wrappingTextBoxFlag xmlns:ma14="http://schemas.microsoft.com/office/mac/drawingml/2011/main" xmlns="" val="0"/>
             </a:ext>
           </a:extLst>
         </p:spPr>
@@ -3956,7 +3753,7 @@
           <a:p>
             <a:pPr algn="l"/>
             <a:fld id="{F7021451-1387-4CA6-816F-3879F97B5CBC}" type="slidenum">
-              <a:rPr b="0" lang="en-US"/>
+              <a:rPr lang="en-US" b="0"/>
               <a:t>5</a:t>
             </a:fld>
             <a:endParaRPr lang="en-US"/>
@@ -3991,9 +3788,11 @@
       <p:sp>
         <p:nvSpPr>
           <p:cNvPr id="2" name="Text 0"/>
-          <p:cNvSpPr/>
+          <p:cNvSpPr>
+            <a:spLocks noGrp="1"/>
+          </p:cNvSpPr>
           <p:nvPr>
-            <p:ph idx="100" type="title" hasCustomPrompt="1"/>
+            <p:ph type="title" idx="100" hasCustomPrompt="1"/>
           </p:nvPr>
         </p:nvSpPr>
         <p:spPr>
@@ -4011,7 +3810,7 @@
           <a:bodyPr wrap="square" lIns="0" tIns="0" rIns="0" bIns="0" rtlCol="0" anchor="ctr"/>
           <a:lstStyle/>
           <a:p>
-            <a:pPr algn="l" indent="0" marL="0">
+            <a:pPr marL="0" indent="0" algn="l">
               <a:buNone/>
             </a:pPr>
             <a:r>
@@ -4031,14 +3830,14 @@
       </p:sp>
       <p:pic>
         <p:nvPicPr>
-          <p:cNvPr id="3" name="Graph" descr="Where MPI loses time graph">    </p:cNvPr>
+          <p:cNvPr id="3" name="Graph" descr="Where MPI loses time graph"/>
           <p:cNvPicPr>
             <a:picLocks noChangeAspect="1"/>
           </p:cNvPicPr>
           <p:nvPr/>
         </p:nvPicPr>
         <p:blipFill>
-          <a:blip r:embed="rId1"/>
+          <a:blip r:embed="rId3"/>
           <a:stretch>
             <a:fillRect/>
           </a:stretch>
@@ -4137,7 +3936,7 @@
           </a:prstGeom>
           <a:extLst>
             <a:ext uri="{C572A759-6A51-4108-AA02-DFA0A04FC94B}">
-              <ma14:wrappingTextBoxFlag xmlns:ma14="http://schemas.microsoft.com/office/mac/drawingml/2011/main" val="0"/>
+              <ma14:wrappingTextBoxFlag xmlns:ma14="http://schemas.microsoft.com/office/mac/drawingml/2011/main" xmlns="" val="0"/>
             </a:ext>
           </a:extLst>
         </p:spPr>
@@ -4155,7 +3954,7 @@
           <a:p>
             <a:pPr algn="l"/>
             <a:fld id="{F7021451-1387-4CA6-816F-3879F97B5CBC}" type="slidenum">
-              <a:rPr b="0" lang="en-US"/>
+              <a:rPr lang="en-US" b="0"/>
               <a:t>6</a:t>
             </a:fld>
             <a:endParaRPr lang="en-US"/>
@@ -4190,9 +3989,11 @@
       <p:sp>
         <p:nvSpPr>
           <p:cNvPr id="2" name="Text 0"/>
-          <p:cNvSpPr/>
+          <p:cNvSpPr>
+            <a:spLocks noGrp="1"/>
+          </p:cNvSpPr>
           <p:nvPr>
-            <p:ph idx="100" type="title" hasCustomPrompt="1"/>
+            <p:ph type="title" idx="100" hasCustomPrompt="1"/>
           </p:nvPr>
         </p:nvSpPr>
         <p:spPr>
@@ -4210,7 +4011,7 @@
           <a:bodyPr wrap="square" lIns="0" tIns="0" rIns="0" bIns="0" rtlCol="0" anchor="ctr"/>
           <a:lstStyle/>
           <a:p>
-            <a:pPr algn="l" indent="0" marL="0">
+            <a:pPr marL="0" indent="0" algn="l">
               <a:buNone/>
             </a:pPr>
             <a:r>
@@ -4230,14 +4031,14 @@
       </p:sp>
       <p:pic>
         <p:nvPicPr>
-          <p:cNvPr id="3" name="Graph" descr="Effect of data size (8 workers) graph">    </p:cNvPr>
+          <p:cNvPr id="3" name="Graph" descr="Effect of data size (8 workers) graph"/>
           <p:cNvPicPr>
             <a:picLocks noChangeAspect="1"/>
           </p:cNvPicPr>
           <p:nvPr/>
         </p:nvPicPr>
         <p:blipFill>
-          <a:blip r:embed="rId1"/>
+          <a:blip r:embed="rId3"/>
           <a:stretch>
             <a:fillRect/>
           </a:stretch>
@@ -4336,7 +4137,7 @@
           </a:prstGeom>
           <a:extLst>
             <a:ext uri="{C572A759-6A51-4108-AA02-DFA0A04FC94B}">
-              <ma14:wrappingTextBoxFlag xmlns:ma14="http://schemas.microsoft.com/office/mac/drawingml/2011/main" val="0"/>
+              <ma14:wrappingTextBoxFlag xmlns:ma14="http://schemas.microsoft.com/office/mac/drawingml/2011/main" xmlns="" val="0"/>
             </a:ext>
           </a:extLst>
         </p:spPr>
@@ -4354,7 +4155,7 @@
           <a:p>
             <a:pPr algn="l"/>
             <a:fld id="{F7021451-1387-4CA6-816F-3879F97B5CBC}" type="slidenum">
-              <a:rPr b="0" lang="en-US"/>
+              <a:rPr lang="en-US" b="0"/>
               <a:t>7</a:t>
             </a:fld>
             <a:endParaRPr lang="en-US"/>
@@ -4389,9 +4190,11 @@
       <p:sp>
         <p:nvSpPr>
           <p:cNvPr id="2" name="Text 0"/>
-          <p:cNvSpPr/>
+          <p:cNvSpPr>
+            <a:spLocks noGrp="1"/>
+          </p:cNvSpPr>
           <p:nvPr>
-            <p:ph idx="100" type="title" hasCustomPrompt="1"/>
+            <p:ph type="title" idx="100" hasCustomPrompt="1"/>
           </p:nvPr>
         </p:nvSpPr>
         <p:spPr>
@@ -4409,7 +4212,7 @@
           <a:bodyPr wrap="square" lIns="0" tIns="0" rIns="0" bIns="0" rtlCol="0" anchor="ctr"/>
           <a:lstStyle/>
           <a:p>
-            <a:pPr algn="l" indent="0" marL="0">
+            <a:pPr marL="0" indent="0" algn="l">
               <a:buNone/>
             </a:pPr>
             <a:r>
@@ -4500,7 +4303,7 @@
           <a:bodyPr wrap="square" lIns="0" tIns="0" rIns="0" bIns="0" rtlCol="0" anchor="t"/>
           <a:lstStyle/>
           <a:p>
-            <a:pPr indent="0" marL="0">
+            <a:pPr marL="0" indent="0">
               <a:buNone/>
             </a:pPr>
             <a:r>
@@ -4539,7 +4342,7 @@
           <a:bodyPr wrap="square" lIns="0" tIns="0" rIns="0" bIns="0" rtlCol="0" anchor="t"/>
           <a:lstStyle/>
           <a:p>
-            <a:pPr indent="0" marL="0">
+            <a:pPr marL="0" indent="0">
               <a:buNone/>
             </a:pPr>
             <a:r>
@@ -4630,7 +4433,7 @@
           <a:bodyPr wrap="square" lIns="0" tIns="0" rIns="0" bIns="0" rtlCol="0" anchor="t"/>
           <a:lstStyle/>
           <a:p>
-            <a:pPr indent="0" marL="0">
+            <a:pPr marL="0" indent="0">
               <a:buNone/>
             </a:pPr>
             <a:r>
@@ -4669,7 +4472,7 @@
           <a:bodyPr wrap="square" lIns="0" tIns="0" rIns="0" bIns="0" rtlCol="0" anchor="t"/>
           <a:lstStyle/>
           <a:p>
-            <a:pPr indent="0" marL="0">
+            <a:pPr marL="0" indent="0">
               <a:buNone/>
             </a:pPr>
             <a:r>
@@ -4760,7 +4563,7 @@
           <a:bodyPr wrap="square" lIns="0" tIns="0" rIns="0" bIns="0" rtlCol="0" anchor="t"/>
           <a:lstStyle/>
           <a:p>
-            <a:pPr indent="0" marL="0">
+            <a:pPr marL="0" indent="0">
               <a:buNone/>
             </a:pPr>
             <a:r>
@@ -4799,7 +4602,7 @@
           <a:bodyPr wrap="square" lIns="0" tIns="0" rIns="0" bIns="0" rtlCol="0" anchor="t"/>
           <a:lstStyle/>
           <a:p>
-            <a:pPr indent="0" marL="0">
+            <a:pPr marL="0" indent="0">
               <a:buNone/>
             </a:pPr>
             <a:r>
@@ -4838,7 +4641,7 @@
           <a:bodyPr wrap="square" lIns="0" tIns="0" rIns="0" bIns="0" rtlCol="0" anchor="ctr"/>
           <a:lstStyle/>
           <a:p>
-            <a:pPr indent="0" marL="0">
+            <a:pPr marL="0" indent="0">
               <a:buNone/>
             </a:pPr>
             <a:r>
@@ -4850,7 +4653,7 @@
                 <a:ea typeface="Calibri" pitchFamily="34" charset="-122"/>
                 <a:cs typeface="Calibri" pitchFamily="34" charset="-120"/>
               </a:rPr>
-              <a:t>Limits and next step</a:t>
+              <a:t>Limits</a:t>
             </a:r>
             <a:endParaRPr lang="en-US" sz="1500" dirty="0"/>
           </a:p>
@@ -4877,7 +4680,7 @@
           <a:bodyPr wrap="square" lIns="0" tIns="0" rIns="0" bIns="0" rtlCol="0" anchor="t"/>
           <a:lstStyle/>
           <a:p>
-            <a:pPr indent="0" marL="0">
+            <a:pPr marL="0" indent="0">
               <a:buNone/>
             </a:pPr>
             <a:r>
@@ -4889,7 +4692,7 @@
                 <a:ea typeface="Calibri" pitchFamily="34" charset="-122"/>
                 <a:cs typeface="Calibri" pitchFamily="34" charset="-120"/>
               </a:rPr>
-              <a:t>These MPI runs share memory inside one machine, so real network cost is not yet included. Next: run MPI across the 4-VM cluster and compare.</a:t>
+              <a:t>These MPI runs share memory inside one machine, so real network cost is not yet included.</a:t>
             </a:r>
             <a:endParaRPr lang="en-US" sz="1400" dirty="0"/>
           </a:p>
@@ -4915,7 +4718,7 @@
           </a:prstGeom>
           <a:extLst>
             <a:ext uri="{C572A759-6A51-4108-AA02-DFA0A04FC94B}">
-              <ma14:wrappingTextBoxFlag xmlns:ma14="http://schemas.microsoft.com/office/mac/drawingml/2011/main" val="0"/>
+              <ma14:wrappingTextBoxFlag xmlns:ma14="http://schemas.microsoft.com/office/mac/drawingml/2011/main" xmlns="" val="0"/>
             </a:ext>
           </a:extLst>
         </p:spPr>
@@ -4933,7 +4736,7 @@
           <a:p>
             <a:pPr algn="l"/>
             <a:fld id="{F7021451-1387-4CA6-816F-3879F97B5CBC}" type="slidenum">
-              <a:rPr b="0" lang="en-US"/>
+              <a:rPr lang="en-US" b="0"/>
               <a:t>8</a:t>
             </a:fld>
             <a:endParaRPr lang="en-US"/>
@@ -5241,4 +5044,299 @@
     </a:ext>
   </a:extLst>
 </a:theme>
+</file>
+
+<file path=ppt/theme/theme2.xml><?xml version="1.0" encoding="utf-8"?>
+<a:theme xmlns:a="http://schemas.openxmlformats.org/drawingml/2006/main" name="Office Theme">
+  <a:themeElements>
+    <a:clrScheme name="Office">
+      <a:dk1>
+        <a:sysClr val="windowText" lastClr="000000"/>
+      </a:dk1>
+      <a:lt1>
+        <a:sysClr val="window" lastClr="FFFFFF"/>
+      </a:lt1>
+      <a:dk2>
+        <a:srgbClr val="44546A"/>
+      </a:dk2>
+      <a:lt2>
+        <a:srgbClr val="E7E6E6"/>
+      </a:lt2>
+      <a:accent1>
+        <a:srgbClr val="4472C4"/>
+      </a:accent1>
+      <a:accent2>
+        <a:srgbClr val="ED7D31"/>
+      </a:accent2>
+      <a:accent3>
+        <a:srgbClr val="A5A5A5"/>
+      </a:accent3>
+      <a:accent4>
+        <a:srgbClr val="FFC000"/>
+      </a:accent4>
+      <a:accent5>
+        <a:srgbClr val="5B9BD5"/>
+      </a:accent5>
+      <a:accent6>
+        <a:srgbClr val="70AD47"/>
+      </a:accent6>
+      <a:hlink>
+        <a:srgbClr val="0563C1"/>
+      </a:hlink>
+      <a:folHlink>
+        <a:srgbClr val="954F72"/>
+      </a:folHlink>
+    </a:clrScheme>
+    <a:fontScheme name="Office">
+      <a:majorFont>
+        <a:latin typeface="Calibri Light" panose="020F0302020204030204"/>
+        <a:ea typeface=""/>
+        <a:cs typeface=""/>
+        <a:font script="Jpan" typeface="游ゴシック Light"/>
+        <a:font script="Hang" typeface="맑은 고딕"/>
+        <a:font script="Hans" typeface="等线 Light"/>
+        <a:font script="Hant" typeface="新細明體"/>
+        <a:font script="Arab" typeface="Times New Roman"/>
+        <a:font script="Hebr" typeface="Times New Roman"/>
+        <a:font script="Thai" typeface="Angsana New"/>
+        <a:font script="Ethi" typeface="Nyala"/>
+        <a:font script="Beng" typeface="Vrinda"/>
+        <a:font script="Gujr" typeface="Shruti"/>
+        <a:font script="Khmr" typeface="MoolBoran"/>
+        <a:font script="Knda" typeface="Tunga"/>
+        <a:font script="Guru" typeface="Raavi"/>
+        <a:font script="Cans" typeface="Euphemia"/>
+        <a:font script="Cher" typeface="Plantagenet Cherokee"/>
+        <a:font script="Yiii" typeface="Microsoft Yi Baiti"/>
+        <a:font script="Tibt" typeface="Microsoft Himalaya"/>
+        <a:font script="Thaa" typeface="MV Boli"/>
+        <a:font script="Deva" typeface="Mangal"/>
+        <a:font script="Telu" typeface="Gautami"/>
+        <a:font script="Taml" typeface="Latha"/>
+        <a:font script="Syrc" typeface="Estrangelo Edessa"/>
+        <a:font script="Orya" typeface="Kalinga"/>
+        <a:font script="Mlym" typeface="Kartika"/>
+        <a:font script="Laoo" typeface="DokChampa"/>
+        <a:font script="Sinh" typeface="Iskoola Pota"/>
+        <a:font script="Mong" typeface="Mongolian Baiti"/>
+        <a:font script="Viet" typeface="Times New Roman"/>
+        <a:font script="Uigh" typeface="Microsoft Uighur"/>
+        <a:font script="Geor" typeface="Sylfaen"/>
+        <a:font script="Armn" typeface="Arial"/>
+        <a:font script="Bugi" typeface="Leelawadee UI"/>
+        <a:font script="Bopo" typeface="Microsoft JhengHei"/>
+        <a:font script="Java" typeface="Javanese Text"/>
+        <a:font script="Lisu" typeface="Segoe UI"/>
+        <a:font script="Mymr" typeface="Myanmar Text"/>
+        <a:font script="Nkoo" typeface="Ebrima"/>
+        <a:font script="Olck" typeface="Nirmala UI"/>
+        <a:font script="Osma" typeface="Ebrima"/>
+        <a:font script="Phag" typeface="Phagspa"/>
+        <a:font script="Syrn" typeface="Estrangelo Edessa"/>
+        <a:font script="Syrj" typeface="Estrangelo Edessa"/>
+        <a:font script="Syre" typeface="Estrangelo Edessa"/>
+        <a:font script="Sora" typeface="Nirmala UI"/>
+        <a:font script="Tale" typeface="Microsoft Tai Le"/>
+        <a:font script="Talu" typeface="Microsoft New Tai Lue"/>
+        <a:font script="Tfng" typeface="Ebrima"/>
+      </a:majorFont>
+      <a:minorFont>
+        <a:latin typeface="Calibri" panose="020F0502020204030204"/>
+        <a:ea typeface=""/>
+        <a:cs typeface=""/>
+        <a:font script="Jpan" typeface="游ゴシック"/>
+        <a:font script="Hang" typeface="맑은 고딕"/>
+        <a:font script="Hans" typeface="等线"/>
+        <a:font script="Hant" typeface="新細明體"/>
+        <a:font script="Arab" typeface="Arial"/>
+        <a:font script="Hebr" typeface="Arial"/>
+        <a:font script="Thai" typeface="Cordia New"/>
+        <a:font script="Ethi" typeface="Nyala"/>
+        <a:font script="Beng" typeface="Vrinda"/>
+        <a:font script="Gujr" typeface="Shruti"/>
+        <a:font script="Khmr" typeface="DaunPenh"/>
+        <a:font script="Knda" typeface="Tunga"/>
+        <a:font script="Guru" typeface="Raavi"/>
+        <a:font script="Cans" typeface="Euphemia"/>
+        <a:font script="Cher" typeface="Plantagenet Cherokee"/>
+        <a:font script="Yiii" typeface="Microsoft Yi Baiti"/>
+        <a:font script="Tibt" typeface="Microsoft Himalaya"/>
+        <a:font script="Thaa" typeface="MV Boli"/>
+        <a:font script="Deva" typeface="Mangal"/>
+        <a:font script="Telu" typeface="Gautami"/>
+        <a:font script="Taml" typeface="Latha"/>
+        <a:font script="Syrc" typeface="Estrangelo Edessa"/>
+        <a:font script="Orya" typeface="Kalinga"/>
+        <a:font script="Mlym" typeface="Kartika"/>
+        <a:font script="Laoo" typeface="DokChampa"/>
+        <a:font script="Sinh" typeface="Iskoola Pota"/>
+        <a:font script="Mong" typeface="Mongolian Baiti"/>
+        <a:font script="Viet" typeface="Arial"/>
+        <a:font script="Uigh" typeface="Microsoft Uighur"/>
+        <a:font script="Geor" typeface="Sylfaen"/>
+        <a:font script="Armn" typeface="Arial"/>
+        <a:font script="Bugi" typeface="Leelawadee UI"/>
+        <a:font script="Bopo" typeface="Microsoft JhengHei"/>
+        <a:font script="Java" typeface="Javanese Text"/>
+        <a:font script="Lisu" typeface="Segoe UI"/>
+        <a:font script="Mymr" typeface="Myanmar Text"/>
+        <a:font script="Nkoo" typeface="Ebrima"/>
+        <a:font script="Olck" typeface="Nirmala UI"/>
+        <a:font script="Osma" typeface="Ebrima"/>
+        <a:font script="Phag" typeface="Phagspa"/>
+        <a:font script="Syrn" typeface="Estrangelo Edessa"/>
+        <a:font script="Syrj" typeface="Estrangelo Edessa"/>
+        <a:font script="Syre" typeface="Estrangelo Edessa"/>
+        <a:font script="Sora" typeface="Nirmala UI"/>
+        <a:font script="Tale" typeface="Microsoft Tai Le"/>
+        <a:font script="Talu" typeface="Microsoft New Tai Lue"/>
+        <a:font script="Tfng" typeface="Ebrima"/>
+      </a:minorFont>
+    </a:fontScheme>
+    <a:fmtScheme name="Office">
+      <a:fillStyleLst>
+        <a:solidFill>
+          <a:schemeClr val="phClr"/>
+        </a:solidFill>
+        <a:gradFill rotWithShape="1">
+          <a:gsLst>
+            <a:gs pos="0">
+              <a:schemeClr val="phClr">
+                <a:lumMod val="110000"/>
+                <a:satMod val="105000"/>
+                <a:tint val="67000"/>
+              </a:schemeClr>
+            </a:gs>
+            <a:gs pos="50000">
+              <a:schemeClr val="phClr">
+                <a:lumMod val="105000"/>
+                <a:satMod val="103000"/>
+                <a:tint val="73000"/>
+              </a:schemeClr>
+            </a:gs>
+            <a:gs pos="100000">
+              <a:schemeClr val="phClr">
+                <a:lumMod val="105000"/>
+                <a:satMod val="109000"/>
+                <a:tint val="81000"/>
+              </a:schemeClr>
+            </a:gs>
+          </a:gsLst>
+          <a:lin ang="5400000" scaled="0"/>
+        </a:gradFill>
+        <a:gradFill rotWithShape="1">
+          <a:gsLst>
+            <a:gs pos="0">
+              <a:schemeClr val="phClr">
+                <a:satMod val="103000"/>
+                <a:lumMod val="102000"/>
+                <a:tint val="94000"/>
+              </a:schemeClr>
+            </a:gs>
+            <a:gs pos="50000">
+              <a:schemeClr val="phClr">
+                <a:satMod val="110000"/>
+                <a:lumMod val="100000"/>
+                <a:shade val="100000"/>
+              </a:schemeClr>
+            </a:gs>
+            <a:gs pos="100000">
+              <a:schemeClr val="phClr">
+                <a:lumMod val="99000"/>
+                <a:satMod val="120000"/>
+                <a:shade val="78000"/>
+              </a:schemeClr>
+            </a:gs>
+          </a:gsLst>
+          <a:lin ang="5400000" scaled="0"/>
+        </a:gradFill>
+      </a:fillStyleLst>
+      <a:lnStyleLst>
+        <a:ln w="6350" cap="flat" cmpd="sng" algn="ctr">
+          <a:solidFill>
+            <a:schemeClr val="phClr"/>
+          </a:solidFill>
+          <a:prstDash val="solid"/>
+          <a:miter lim="800000"/>
+        </a:ln>
+        <a:ln w="12700" cap="flat" cmpd="sng" algn="ctr">
+          <a:solidFill>
+            <a:schemeClr val="phClr"/>
+          </a:solidFill>
+          <a:prstDash val="solid"/>
+          <a:miter lim="800000"/>
+        </a:ln>
+        <a:ln w="19050" cap="flat" cmpd="sng" algn="ctr">
+          <a:solidFill>
+            <a:schemeClr val="phClr"/>
+          </a:solidFill>
+          <a:prstDash val="solid"/>
+          <a:miter lim="800000"/>
+        </a:ln>
+      </a:lnStyleLst>
+      <a:effectStyleLst>
+        <a:effectStyle>
+          <a:effectLst/>
+        </a:effectStyle>
+        <a:effectStyle>
+          <a:effectLst/>
+        </a:effectStyle>
+        <a:effectStyle>
+          <a:effectLst>
+            <a:outerShdw blurRad="57150" dist="19050" dir="5400000" algn="ctr" rotWithShape="0">
+              <a:srgbClr val="000000">
+                <a:alpha val="63000"/>
+              </a:srgbClr>
+            </a:outerShdw>
+          </a:effectLst>
+        </a:effectStyle>
+      </a:effectStyleLst>
+      <a:bgFillStyleLst>
+        <a:solidFill>
+          <a:schemeClr val="phClr"/>
+        </a:solidFill>
+        <a:solidFill>
+          <a:schemeClr val="phClr">
+            <a:tint val="95000"/>
+            <a:satMod val="170000"/>
+          </a:schemeClr>
+        </a:solidFill>
+        <a:gradFill rotWithShape="1">
+          <a:gsLst>
+            <a:gs pos="0">
+              <a:schemeClr val="phClr">
+                <a:tint val="93000"/>
+                <a:satMod val="150000"/>
+                <a:shade val="98000"/>
+                <a:lumMod val="102000"/>
+              </a:schemeClr>
+            </a:gs>
+            <a:gs pos="50000">
+              <a:schemeClr val="phClr">
+                <a:tint val="98000"/>
+                <a:satMod val="130000"/>
+                <a:shade val="90000"/>
+                <a:lumMod val="103000"/>
+              </a:schemeClr>
+            </a:gs>
+            <a:gs pos="100000">
+              <a:schemeClr val="phClr">
+                <a:shade val="63000"/>
+                <a:satMod val="120000"/>
+              </a:schemeClr>
+            </a:gs>
+          </a:gsLst>
+          <a:lin ang="5400000" scaled="0"/>
+        </a:gradFill>
+      </a:bgFillStyleLst>
+    </a:fmtScheme>
+  </a:themeElements>
+  <a:objectDefaults/>
+  <a:extraClrSchemeLst/>
+  <a:extLst>
+    <a:ext uri="{05A4C25C-085E-4340-85A3-A5531E510DB2}">
+      <thm15:themeFamily xmlns:thm15="http://schemas.microsoft.com/office/thememl/2012/main" name="Office Theme" id="{62F939B6-93AF-4DB8-9C6B-D6C7DFDC589F}" vid="{4A3C46E8-61CC-4603-A589-7422A47A8E4A}"/>
+    </a:ext>
+  </a:extLst>
+</a:theme>
 </file>